--- a/chapter13/parts/part-06-licensing-and-ethics/clip.pptx
+++ b/chapter13/parts/part-06-licensing-and-ethics/clip.pptx
@@ -14,6 +14,8 @@
     <p:sldId id="262" r:id="rId14"/>
     <p:sldId id="263" r:id="rId15"/>
     <p:sldId id="264" r:id="rId16"/>
+    <p:sldId id="265" r:id="rId17"/>
+    <p:sldId id="266" r:id="rId18"/>
   </p:sldIdLst>
   <p:sldSz cx="12191695" cy="6858000" type="screen4x3"/>
   <p:notesSz cx="6858000" cy="9144000"/>
@@ -510,7 +512,147 @@
           <a:lstStyle/>
           <a:p>
             <a:r>
-              <a:t>Openness is not unlimited. Licenses, privacy, bias, and community control constrain what can be shared. This part covers open-data licensing, balancing openness with privacy, and ethical risks in open science.</a:t>
+              <a:t>Openness is not unlimited. Licenses, privacy, bias, and community control constrain what can be shared. This part covers open-data licensing families, balancing openness with privacy, ethical risks in open science, and a use-case license chooser.</a:t>
+            </a:r>
+          </a:p>
+        </p:txBody>
+      </p:sp>
+      <p:sp>
+        <p:nvSpPr>
+          <p:cNvPr id="4" name="Slide Number Placeholder 3"/>
+          <p:cNvSpPr>
+            <a:spLocks noGrp="1"/>
+          </p:cNvSpPr>
+          <p:nvPr>
+            <p:ph type="sldNum" idx="5" sz="quarter"/>
+          </p:nvPr>
+        </p:nvSpPr>
+        <p:spPr/>
+      </p:sp>
+    </p:spTree>
+  </p:cSld>
+  <p:clrMapOvr>
+    <a:masterClrMapping/>
+  </p:clrMapOvr>
+</p:notes>
+</file>
+
+<file path=ppt/notesSlides/notesSlide10.xml><?xml version="1.0" encoding="utf-8"?>
+<p:notes xmlns:a="http://schemas.openxmlformats.org/drawingml/2006/main" xmlns:p="http://schemas.openxmlformats.org/presentationml/2006/main" xmlns:r="http://schemas.openxmlformats.org/officeDocument/2006/relationships">
+  <p:cSld>
+    <p:spTree>
+      <p:nvGrpSpPr>
+        <p:cNvPr id="1" name=""/>
+        <p:cNvGrpSpPr/>
+        <p:nvPr/>
+      </p:nvGrpSpPr>
+      <p:grpSpPr>
+        <a:xfrm>
+          <a:off x="0" y="0"/>
+          <a:ext cx="0" cy="0"/>
+          <a:chOff x="0" y="0"/>
+          <a:chExt cx="0" cy="0"/>
+        </a:xfrm>
+      </p:grpSpPr>
+      <p:sp>
+        <p:nvSpPr>
+          <p:cNvPr id="2" name="Slide Image Placeholder 1"/>
+          <p:cNvSpPr>
+            <a:spLocks noGrp="1"/>
+          </p:cNvSpPr>
+          <p:nvPr>
+            <p:ph type="sldImg" idx="2"/>
+          </p:nvPr>
+        </p:nvSpPr>
+        <p:spPr/>
+      </p:sp>
+      <p:sp>
+        <p:nvSpPr>
+          <p:cNvPr id="3" name="Notes Placeholder 2"/>
+          <p:cNvSpPr>
+            <a:spLocks noGrp="1"/>
+          </p:cNvSpPr>
+          <p:nvPr>
+            <p:ph type="body" idx="3" sz="quarter"/>
+          </p:nvPr>
+        </p:nvSpPr>
+        <p:spPr/>
+        <p:txBody>
+          <a:bodyPr/>
+          <a:lstStyle/>
+          <a:p>
+            <a:r>
+              <a:t>Match the license family to the artifact: Creative Commons or Open Data Commons for data, software licenses for companion code. Restricted access—not an open deed—for sensitive health or community-controlled data. License choice must follow a privacy assessment, not precede it. Open release creates ongoing ethical duties around bias, security, attribution, and scope. Communities, including Indigenous communities, retain legitimate control over sharing decisions.</a:t>
+            </a:r>
+          </a:p>
+        </p:txBody>
+      </p:sp>
+      <p:sp>
+        <p:nvSpPr>
+          <p:cNvPr id="4" name="Slide Number Placeholder 3"/>
+          <p:cNvSpPr>
+            <a:spLocks noGrp="1"/>
+          </p:cNvSpPr>
+          <p:nvPr>
+            <p:ph type="sldNum" idx="5" sz="quarter"/>
+          </p:nvPr>
+        </p:nvSpPr>
+        <p:spPr/>
+      </p:sp>
+    </p:spTree>
+  </p:cSld>
+  <p:clrMapOvr>
+    <a:masterClrMapping/>
+  </p:clrMapOvr>
+</p:notes>
+</file>
+
+<file path=ppt/notesSlides/notesSlide11.xml><?xml version="1.0" encoding="utf-8"?>
+<p:notes xmlns:a="http://schemas.openxmlformats.org/drawingml/2006/main" xmlns:p="http://schemas.openxmlformats.org/presentationml/2006/main" xmlns:r="http://schemas.openxmlformats.org/officeDocument/2006/relationships">
+  <p:cSld>
+    <p:spTree>
+      <p:nvGrpSpPr>
+        <p:cNvPr id="1" name=""/>
+        <p:cNvGrpSpPr/>
+        <p:nvPr/>
+      </p:nvGrpSpPr>
+      <p:grpSpPr>
+        <a:xfrm>
+          <a:off x="0" y="0"/>
+          <a:ext cx="0" cy="0"/>
+          <a:chOff x="0" y="0"/>
+          <a:chExt cx="0" cy="0"/>
+        </a:xfrm>
+      </p:grpSpPr>
+      <p:sp>
+        <p:nvSpPr>
+          <p:cNvPr id="2" name="Slide Image Placeholder 1"/>
+          <p:cNvSpPr>
+            <a:spLocks noGrp="1"/>
+          </p:cNvSpPr>
+          <p:nvPr>
+            <p:ph type="sldImg" idx="2"/>
+          </p:nvPr>
+        </p:nvSpPr>
+        <p:spPr/>
+      </p:sp>
+      <p:sp>
+        <p:nvSpPr>
+          <p:cNvPr id="3" name="Notes Placeholder 2"/>
+          <p:cNvSpPr>
+            <a:spLocks noGrp="1"/>
+          </p:cNvSpPr>
+          <p:nvPr>
+            <p:ph type="body" idx="3" sz="quarter"/>
+          </p:nvPr>
+        </p:nvSpPr>
+        <p:spPr/>
+        <p:txBody>
+          <a:bodyPr/>
+          <a:lstStyle/>
+          <a:p>
+            <a:r>
+              <a:t>The next part covers reproducible research workflows: workflow files, Jupyter notebooks, and Docker containers for fixed tool and machine-learning stacks.</a:t>
             </a:r>
           </a:p>
         </p:txBody>
@@ -580,7 +722,7 @@
           <a:lstStyle/>
           <a:p>
             <a:r>
-              <a:t>By the end of this part, learners should be able to explain why sensitive health data may require restricted licenses; describe the openness-versus-privacy trade-off for license choice; recognize ethical risks of reinforcing bias with open datasets; and state why communities, including indigenous communities, should control how their data are shared.</a:t>
+              <a:t>By the end of this part, learners should be able to match common Creative Commons and Open Data Commons licenses to reuse goals; explain why sensitive or community-controlled data need restricted access; distinguish dataset licenses from companion software licenses; describe the openness-versus-privacy trade-off; recognize ethical risks of reinforcing bias with open datasets; and state why communities, including Indigenous communities, should control how their data are shared.</a:t>
             </a:r>
           </a:p>
         </p:txBody>
@@ -650,7 +792,7 @@
           <a:lstStyle/>
           <a:p>
             <a:r>
-              <a:t>Responsible open science depends on clear licenses and ethical constraints. Some teams draft custom or restricted licenses that limit redistribution, require ethical use, or control who may access the data. Privacy principles and techniques are developed in Chapter 3; the open-science question is how those constraints interact with license choice. An unrestricted open license signals broad reuse and is appropriate only after privacy techniques have made that reuse safe.</a:t>
+              <a:t>Creative Commons covers CC0, CC BY, CC BY-SA, CC BY-NC, and CC BY-NC-SA. Open Data Commons adds database-oriented paths: ODC-By, ODbL, and PDDL. Companion code beside a dataset usually needs a software license such as MIT, BSD-3-Clause, Apache-2.0, or GPL-3.0—not a Creative Commons deed by default. License choice follows the intended reuse, not the row layout of a CSV.</a:t>
             </a:r>
           </a:p>
         </p:txBody>
@@ -720,7 +862,7 @@
           <a:lstStyle/>
           <a:p>
             <a:r>
-              <a:t>Example 13.26 illustrates restricted licensing for sensitive health data. Use may be limited to qualified researchers or specific contexts such as academic or non-profit use. Clinical trial data and patient records cannot carry an unrestricted open license when regulation requires de-identification first, and even de-identified data may remain re-identifiable when combined with other releases. The example 26 module for this chapter summarizes that restricted-license pattern.</a:t>
+              <a:t>Ask whether the release is sensitive or community-controlled; whether commercial reuse is allowed; whether attribution is required; whether derivatives must ShareAlike; and whether the artifact is data or companion code. Public-domain paths suit government tables; CC BY or ODC-By suit research data that need credit; ShareAlike suits collaborative commons; NonCommercial suits education-only releases; restricted access suits health and community-controlled data. Practice these paths in the course license chooser.</a:t>
             </a:r>
           </a:p>
         </p:txBody>
@@ -790,7 +932,7 @@
           <a:lstStyle/>
           <a:p>
             <a:r>
-              <a:t>Ethical principles for collection and privacy are covered in Chapter 3. Open science adds obligations that arise from making data public: minimize risk to participants, and state what the published data can and cannot support. Researchers should document scope and limitations, including biases or collection gaps that could affect downstream research or policy. Consent obtained during collection must also cover the intended public release.</a:t>
+              <a:t>Responsible open science depends on clear licenses and ethical constraints. Some teams draft custom or restricted licenses that limit redistribution, require ethical use, or control who may access the data. Privacy principles and techniques are developed in Chapter 3; the open-science question is how those constraints interact with license choice. An unrestricted open license signals broad reuse and is appropriate only after privacy techniques have made that reuse safe.</a:t>
             </a:r>
           </a:p>
         </p:txBody>
@@ -860,7 +1002,7 @@
           <a:lstStyle/>
           <a:p>
             <a:r>
-              <a:t>Ethical concerns do not end when data are shared; they extend to reuse. Example 13.27 warns against discriminatory reuse of hiring or healthcare datasets. Such data should not be used to reinforce biases or perpetuate systemic inequalities. If data reveal disparities, analysis should proceed with care to avoid reinforcing stereotypes or unjust practices. The example 27 module for this chapter frames that non-discrimination obligation.</a:t>
+              <a:t>Example 13.26 illustrates restricted licensing for sensitive health data. Use may be limited to qualified researchers or specific contexts such as academic or non-profit use. Clinical trial data and patient records cannot carry an unrestricted open license when regulation requires de-identification first, and even de-identified data may remain re-identifiable when combined with other releases. The example 26 module for this chapter summarizes that restricted-license pattern.</a:t>
             </a:r>
           </a:p>
         </p:txBody>
@@ -930,7 +1072,7 @@
           <a:lstStyle/>
           <a:p>
             <a:r>
-              <a:t>Open science must respect the rights and wishes of people and communities whose data are used. Communities involved in collection, especially marginalized or vulnerable populations, should have a say in how their data are used and shared. Example 13.28 emphasizes that indigenous communities involved in ecological or environmental research should control how their data are used and shared so that sharing aligns with cultural values and ethical standards. The example 28 module for this chapter covers community authority over shared data.</a:t>
+              <a:t>Ethical principles for collection and privacy are covered in Chapter 3. Open science adds obligations that arise from making data public: minimize risk to participants, and state what the published data can and cannot support. Researchers should document scope and limitations, including biases or collection gaps that could affect downstream research or policy. Consent obtained during collection must also cover the intended public release.</a:t>
             </a:r>
           </a:p>
         </p:txBody>
@@ -1000,7 +1142,7 @@
           <a:lstStyle/>
           <a:p>
             <a:r>
-              <a:t>Licenses can be open or restricted; health data often need limited-access terms. License choice must follow a privacy assessment, not precede it. Open release creates ongoing ethical duties around bias, security, attribution, and scope. Communities, including indigenous communities, retain legitimate control over sharing decisions. Openness without ethics and privacy is not responsible open science.</a:t>
+              <a:t>Ethical concerns do not end when data are shared; they extend to reuse. Example 13.27 warns against discriminatory reuse of hiring or healthcare datasets. Such data should not be used to reinforce biases or perpetuate systemic inequalities. If data reveal disparities, analysis should proceed with care to avoid reinforcing stereotypes or unjust practices. The example 27 module for this chapter frames that non-discrimination obligation.</a:t>
             </a:r>
           </a:p>
         </p:txBody>
@@ -1070,7 +1212,7 @@
           <a:lstStyle/>
           <a:p>
             <a:r>
-              <a:t>The next part covers reproducible research workflows: workflow files, Jupyter notebooks, and Docker containers for fixed tool and machine-learning stacks.</a:t>
+              <a:t>Open science must respect the rights and wishes of people and communities whose data are used. Communities involved in collection, especially marginalized or vulnerable populations, should have a say in how their data are used and shared. Example 13.28 emphasizes that Indigenous communities involved in ecological or environmental research should control how their data are used and shared so that sharing aligns with cultural values and ethical standards. The example 28 module for this chapter covers community authority over shared data.</a:t>
             </a:r>
           </a:p>
         </p:txBody>
@@ -4184,6 +4326,398 @@
 </p:sld>
 </file>
 
+<file path=ppt/slides/slide10.xml><?xml version="1.0" encoding="utf-8"?>
+<p:sld xmlns:a="http://schemas.openxmlformats.org/drawingml/2006/main" xmlns:p="http://schemas.openxmlformats.org/presentationml/2006/main" xmlns:r="http://schemas.openxmlformats.org/officeDocument/2006/relationships">
+  <p:cSld>
+    <p:spTree>
+      <p:nvGrpSpPr>
+        <p:cNvPr id="1" name=""/>
+        <p:cNvGrpSpPr/>
+        <p:nvPr/>
+      </p:nvGrpSpPr>
+      <p:grpSpPr/>
+      <p:sp>
+        <p:nvSpPr>
+          <p:cNvPr id="2" name="TextBox 1"/>
+          <p:cNvSpPr txBox="1"/>
+          <p:nvPr/>
+        </p:nvSpPr>
+        <p:spPr>
+          <a:xfrm>
+            <a:off x="548640" y="411480"/>
+            <a:ext cx="11064240" cy="777240"/>
+          </a:xfrm>
+          <a:prstGeom prst="rect">
+            <a:avLst/>
+          </a:prstGeom>
+          <a:noFill/>
+        </p:spPr>
+        <p:txBody>
+          <a:bodyPr wrap="square">
+            <a:noAutofit/>
+          </a:bodyPr>
+          <a:lstStyle/>
+          <a:p>
+            <a:pPr>
+              <a:lnSpc>
+                <a:spcPts val="2200"/>
+              </a:lnSpc>
+            </a:pPr>
+            <a:r>
+              <a:rPr sz="2800" b="1">
+                <a:solidFill>
+                  <a:srgbClr val="1A1A2E"/>
+                </a:solidFill>
+                <a:latin typeface="Calibri"/>
+              </a:rPr>
+              <a:t>Takeaways</a:t>
+            </a:r>
+          </a:p>
+        </p:txBody>
+      </p:sp>
+      <p:sp>
+        <p:nvSpPr>
+          <p:cNvPr id="3" name="TextBox 2"/>
+          <p:cNvSpPr txBox="1"/>
+          <p:nvPr/>
+        </p:nvSpPr>
+        <p:spPr>
+          <a:xfrm>
+            <a:off x="548640" y="1234440"/>
+            <a:ext cx="11064240" cy="4937760"/>
+          </a:xfrm>
+          <a:prstGeom prst="rect">
+            <a:avLst/>
+          </a:prstGeom>
+          <a:noFill/>
+        </p:spPr>
+        <p:txBody>
+          <a:bodyPr wrap="square">
+            <a:noAutofit/>
+          </a:bodyPr>
+          <a:lstStyle/>
+          <a:p>
+            <a:pPr lvl="0" marL="457200" indent="-228600">
+              <a:buFont typeface="Calibri"/>
+              <a:spcAft>
+                <a:spcPts val="1000"/>
+              </a:spcAft>
+              <a:buSzPct val="100000"/>
+              <a:buChar char="•"/>
+              <a:lnSpc>
+                <a:spcPts val="2200"/>
+              </a:lnSpc>
+            </a:pPr>
+            <a:r>
+              <a:rPr sz="2000" b="0">
+                <a:solidFill>
+                  <a:srgbClr val="333333"/>
+                </a:solidFill>
+                <a:latin typeface="Calibri"/>
+              </a:rPr>
+              <a:t>Match the license family to the artifact</a:t>
+            </a:r>
+          </a:p>
+          <a:p>
+            <a:pPr lvl="0" marL="457200" indent="-228600">
+              <a:buFont typeface="Calibri"/>
+              <a:spcAft>
+                <a:spcPts val="1000"/>
+              </a:spcAft>
+              <a:buSzPct val="100000"/>
+              <a:buChar char="•"/>
+              <a:lnSpc>
+                <a:spcPts val="2200"/>
+              </a:lnSpc>
+            </a:pPr>
+            <a:r>
+              <a:rPr sz="2000" b="0">
+                <a:solidFill>
+                  <a:srgbClr val="333333"/>
+                </a:solidFill>
+                <a:latin typeface="Calibri"/>
+              </a:rPr>
+              <a:t>Restricted access, not an open deed, for sensitive health or community-controlled data</a:t>
+            </a:r>
+          </a:p>
+          <a:p>
+            <a:pPr lvl="0" marL="457200" indent="-228600">
+              <a:buFont typeface="Calibri"/>
+              <a:spcAft>
+                <a:spcPts val="1000"/>
+              </a:spcAft>
+              <a:buSzPct val="100000"/>
+              <a:buChar char="•"/>
+              <a:lnSpc>
+                <a:spcPts val="2200"/>
+              </a:lnSpc>
+            </a:pPr>
+            <a:r>
+              <a:rPr sz="2000" b="0">
+                <a:solidFill>
+                  <a:srgbClr val="333333"/>
+                </a:solidFill>
+                <a:latin typeface="Calibri"/>
+              </a:rPr>
+              <a:t>License choice must follow a privacy assessment, not precede it</a:t>
+            </a:r>
+          </a:p>
+          <a:p>
+            <a:pPr lvl="0" marL="457200" indent="-228600">
+              <a:buFont typeface="Calibri"/>
+              <a:spcAft>
+                <a:spcPts val="1000"/>
+              </a:spcAft>
+              <a:buSzPct val="100000"/>
+              <a:buChar char="•"/>
+              <a:lnSpc>
+                <a:spcPts val="2200"/>
+              </a:lnSpc>
+            </a:pPr>
+            <a:r>
+              <a:rPr sz="2000" b="0">
+                <a:solidFill>
+                  <a:srgbClr val="333333"/>
+                </a:solidFill>
+                <a:latin typeface="Calibri"/>
+              </a:rPr>
+              <a:t>Open release creates ongoing ethical duties around bias, security, attribution, and scope</a:t>
+            </a:r>
+          </a:p>
+          <a:p>
+            <a:pPr lvl="0" marL="457200" indent="-228600">
+              <a:buFont typeface="Calibri"/>
+              <a:spcAft>
+                <a:spcPts val="1000"/>
+              </a:spcAft>
+              <a:buSzPct val="100000"/>
+              <a:buChar char="•"/>
+              <a:lnSpc>
+                <a:spcPts val="2200"/>
+              </a:lnSpc>
+            </a:pPr>
+            <a:r>
+              <a:rPr sz="2000" b="0">
+                <a:solidFill>
+                  <a:srgbClr val="333333"/>
+                </a:solidFill>
+                <a:latin typeface="Calibri"/>
+              </a:rPr>
+              <a:t>Including Indigenous communities, retain legitimate control over sharing decisions</a:t>
+            </a:r>
+          </a:p>
+        </p:txBody>
+      </p:sp>
+      <p:sp>
+        <p:nvSpPr>
+          <p:cNvPr id="4" name="TextBox 3"/>
+          <p:cNvSpPr txBox="1"/>
+          <p:nvPr/>
+        </p:nvSpPr>
+        <p:spPr>
+          <a:xfrm>
+            <a:off x="548640" y="6355080"/>
+            <a:ext cx="11064240" cy="320040"/>
+          </a:xfrm>
+          <a:prstGeom prst="rect">
+            <a:avLst/>
+          </a:prstGeom>
+          <a:noFill/>
+        </p:spPr>
+        <p:txBody>
+          <a:bodyPr wrap="square">
+            <a:noAutofit/>
+          </a:bodyPr>
+          <a:lstStyle/>
+          <a:p>
+            <a:pPr algn="r">
+              <a:lnSpc>
+                <a:spcPts val="2200"/>
+              </a:lnSpc>
+              <a:defRPr sz="1000" b="0">
+                <a:solidFill>
+                  <a:srgbClr val="666666"/>
+                </a:solidFill>
+                <a:latin typeface="Calibri"/>
+              </a:defRPr>
+            </a:pPr>
+            <a:r>
+              <a:t>Chapter 13 — Licensing And Ethics</a:t>
+            </a:r>
+          </a:p>
+        </p:txBody>
+      </p:sp>
+    </p:spTree>
+  </p:cSld>
+  <p:clrMapOvr>
+    <a:masterClrMapping/>
+  </p:clrMapOvr>
+</p:sld>
+</file>
+
+<file path=ppt/slides/slide11.xml><?xml version="1.0" encoding="utf-8"?>
+<p:sld xmlns:a="http://schemas.openxmlformats.org/drawingml/2006/main" xmlns:p="http://schemas.openxmlformats.org/presentationml/2006/main" xmlns:r="http://schemas.openxmlformats.org/officeDocument/2006/relationships">
+  <p:cSld>
+    <p:spTree>
+      <p:nvGrpSpPr>
+        <p:cNvPr id="1" name=""/>
+        <p:cNvGrpSpPr/>
+        <p:nvPr/>
+      </p:nvGrpSpPr>
+      <p:grpSpPr/>
+      <p:sp>
+        <p:nvSpPr>
+          <p:cNvPr id="2" name="TextBox 1"/>
+          <p:cNvSpPr txBox="1"/>
+          <p:nvPr/>
+        </p:nvSpPr>
+        <p:spPr>
+          <a:xfrm>
+            <a:off x="548640" y="411480"/>
+            <a:ext cx="11064240" cy="777240"/>
+          </a:xfrm>
+          <a:prstGeom prst="rect">
+            <a:avLst/>
+          </a:prstGeom>
+          <a:noFill/>
+        </p:spPr>
+        <p:txBody>
+          <a:bodyPr wrap="square">
+            <a:noAutofit/>
+          </a:bodyPr>
+          <a:lstStyle/>
+          <a:p>
+            <a:pPr>
+              <a:lnSpc>
+                <a:spcPts val="2200"/>
+              </a:lnSpc>
+            </a:pPr>
+            <a:r>
+              <a:rPr sz="2800" b="1">
+                <a:solidFill>
+                  <a:srgbClr val="1A1A2E"/>
+                </a:solidFill>
+                <a:latin typeface="Calibri"/>
+              </a:rPr>
+              <a:t>Next</a:t>
+            </a:r>
+          </a:p>
+        </p:txBody>
+      </p:sp>
+      <p:sp>
+        <p:nvSpPr>
+          <p:cNvPr id="3" name="TextBox 2"/>
+          <p:cNvSpPr txBox="1"/>
+          <p:nvPr/>
+        </p:nvSpPr>
+        <p:spPr>
+          <a:xfrm>
+            <a:off x="548640" y="1234440"/>
+            <a:ext cx="11064240" cy="4937760"/>
+          </a:xfrm>
+          <a:prstGeom prst="rect">
+            <a:avLst/>
+          </a:prstGeom>
+          <a:noFill/>
+        </p:spPr>
+        <p:txBody>
+          <a:bodyPr wrap="square">
+            <a:noAutofit/>
+          </a:bodyPr>
+          <a:lstStyle/>
+          <a:p>
+            <a:pPr lvl="0" marL="457200" indent="-228600">
+              <a:buFont typeface="Calibri"/>
+              <a:spcAft>
+                <a:spcPts val="1000"/>
+              </a:spcAft>
+              <a:buSzPct val="100000"/>
+              <a:buChar char="•"/>
+              <a:lnSpc>
+                <a:spcPts val="2200"/>
+              </a:lnSpc>
+            </a:pPr>
+            <a:r>
+              <a:rPr sz="2000" b="0">
+                <a:solidFill>
+                  <a:srgbClr val="333333"/>
+                </a:solidFill>
+                <a:latin typeface="Calibri"/>
+              </a:rPr>
+              <a:t>Complete the quiz for this part</a:t>
+            </a:r>
+          </a:p>
+          <a:p>
+            <a:pPr lvl="0" marL="457200" indent="-228600">
+              <a:buFont typeface="Calibri"/>
+              <a:spcAft>
+                <a:spcPts val="1000"/>
+              </a:spcAft>
+              <a:buSzPct val="100000"/>
+              <a:buChar char="•"/>
+              <a:lnSpc>
+                <a:spcPts val="2200"/>
+              </a:lnSpc>
+            </a:pPr>
+            <a:r>
+              <a:rPr sz="2000" b="0">
+                <a:solidFill>
+                  <a:srgbClr val="333333"/>
+                </a:solidFill>
+                <a:latin typeface="Calibri"/>
+              </a:rPr>
+              <a:t>The next part covers reproducible research workflows</a:t>
+            </a:r>
+          </a:p>
+        </p:txBody>
+      </p:sp>
+      <p:sp>
+        <p:nvSpPr>
+          <p:cNvPr id="4" name="TextBox 3"/>
+          <p:cNvSpPr txBox="1"/>
+          <p:nvPr/>
+        </p:nvSpPr>
+        <p:spPr>
+          <a:xfrm>
+            <a:off x="548640" y="6355080"/>
+            <a:ext cx="11064240" cy="320040"/>
+          </a:xfrm>
+          <a:prstGeom prst="rect">
+            <a:avLst/>
+          </a:prstGeom>
+          <a:noFill/>
+        </p:spPr>
+        <p:txBody>
+          <a:bodyPr wrap="square">
+            <a:noAutofit/>
+          </a:bodyPr>
+          <a:lstStyle/>
+          <a:p>
+            <a:pPr algn="r">
+              <a:lnSpc>
+                <a:spcPts val="2200"/>
+              </a:lnSpc>
+              <a:defRPr sz="1000" b="0">
+                <a:solidFill>
+                  <a:srgbClr val="666666"/>
+                </a:solidFill>
+                <a:latin typeface="Calibri"/>
+              </a:defRPr>
+            </a:pPr>
+            <a:r>
+              <a:t>Chapter 13 — Licensing And Ethics</a:t>
+            </a:r>
+          </a:p>
+        </p:txBody>
+      </p:sp>
+    </p:spTree>
+  </p:cSld>
+  <p:clrMapOvr>
+    <a:masterClrMapping/>
+  </p:clrMapOvr>
+</p:sld>
+</file>
+
 <file path=ppt/slides/slide2.xml><?xml version="1.0" encoding="utf-8"?>
 <p:sld xmlns:a="http://schemas.openxmlformats.org/drawingml/2006/main" xmlns:p="http://schemas.openxmlformats.org/presentationml/2006/main" xmlns:r="http://schemas.openxmlformats.org/officeDocument/2006/relationships">
   <p:cSld>
@@ -4255,10 +4789,12 @@
           </a:bodyPr>
           <a:lstStyle/>
           <a:p>
-            <a:pPr>
+            <a:pPr lvl="0" marL="457200" indent="-228600">
+              <a:buFont typeface="Calibri"/>
               <a:spcAft>
                 <a:spcPts val="1000"/>
               </a:spcAft>
+              <a:buSzPct val="100000"/>
               <a:buChar char="•"/>
               <a:lnSpc>
                 <a:spcPts val="2200"/>
@@ -4367,7 +4903,7 @@
                 </a:solidFill>
                 <a:latin typeface="Calibri"/>
               </a:rPr>
-              <a:t>Licenses and the privacy trade-off</a:t>
+              <a:t>Open license menu</a:t>
             </a:r>
           </a:p>
         </p:txBody>
@@ -4394,10 +4930,12 @@
           </a:bodyPr>
           <a:lstStyle/>
           <a:p>
-            <a:pPr>
+            <a:pPr lvl="0" marL="457200" indent="-228600">
+              <a:buFont typeface="Calibri"/>
               <a:spcAft>
                 <a:spcPts val="1000"/>
               </a:spcAft>
+              <a:buSzPct val="100000"/>
               <a:buChar char="•"/>
               <a:lnSpc>
                 <a:spcPts val="2200"/>
@@ -4410,14 +4948,16 @@
                 </a:solidFill>
                 <a:latin typeface="Calibri"/>
               </a:rPr>
-              <a:t>Responsible open science depends on clear licenses and ethical constraints</a:t>
-            </a:r>
-          </a:p>
-          <a:p>
-            <a:pPr>
+              <a:t>Creative Commons covers CC0, CC BY, CC BY-SA, CC BY-NC, and CC BY-NC-SA</a:t>
+            </a:r>
+          </a:p>
+          <a:p>
+            <a:pPr lvl="0" marL="457200" indent="-228600">
+              <a:buFont typeface="Calibri"/>
               <a:spcAft>
                 <a:spcPts val="1000"/>
               </a:spcAft>
+              <a:buSzPct val="100000"/>
               <a:buChar char="•"/>
               <a:lnSpc>
                 <a:spcPts val="2200"/>
@@ -4430,14 +4970,16 @@
                 </a:solidFill>
                 <a:latin typeface="Calibri"/>
               </a:rPr>
-              <a:t>Some teams draft custom or restricted licenses that limit redistribution</a:t>
-            </a:r>
-          </a:p>
-          <a:p>
-            <a:pPr>
+              <a:t>Open Data Commons adds database-oriented paths: ODC-By, ODbL, and PDDL</a:t>
+            </a:r>
+          </a:p>
+          <a:p>
+            <a:pPr lvl="0" marL="457200" indent="-228600">
+              <a:buFont typeface="Calibri"/>
               <a:spcAft>
                 <a:spcPts val="1000"/>
               </a:spcAft>
+              <a:buSzPct val="100000"/>
               <a:buChar char="•"/>
               <a:lnSpc>
                 <a:spcPts val="2200"/>
@@ -4450,14 +4992,16 @@
                 </a:solidFill>
                 <a:latin typeface="Calibri"/>
               </a:rPr>
-              <a:t>Privacy principles and techniques are developed in Chapter 3</a:t>
-            </a:r>
-          </a:p>
-          <a:p>
-            <a:pPr>
+              <a:t>Companion code beside a dataset usually needs a software license such as MIT</a:t>
+            </a:r>
+          </a:p>
+          <a:p>
+            <a:pPr lvl="0" marL="457200" indent="-228600">
+              <a:buFont typeface="Calibri"/>
               <a:spcAft>
                 <a:spcPts val="1000"/>
               </a:spcAft>
+              <a:buSzPct val="100000"/>
               <a:buChar char="•"/>
               <a:lnSpc>
                 <a:spcPts val="2200"/>
@@ -4470,7 +5014,7 @@
                 </a:solidFill>
                 <a:latin typeface="Calibri"/>
               </a:rPr>
-              <a:t>An unrestricted open license signals broad reuse and is appropriate only after privacy</a:t>
+              <a:t>License choice follows the intended reuse, not the row layout of a CSV</a:t>
             </a:r>
           </a:p>
         </p:txBody>
@@ -4566,7 +5110,7 @@
                 </a:solidFill>
                 <a:latin typeface="Calibri"/>
               </a:rPr>
-              <a:t>Example 13.26 — Restricted Licenses for Health Data</a:t>
+              <a:t>Choosing from the use case</a:t>
             </a:r>
           </a:p>
         </p:txBody>
@@ -4593,10 +5137,12 @@
           </a:bodyPr>
           <a:lstStyle/>
           <a:p>
-            <a:pPr>
+            <a:pPr lvl="0" marL="457200" indent="-228600">
+              <a:buFont typeface="Calibri"/>
               <a:spcAft>
                 <a:spcPts val="1000"/>
               </a:spcAft>
+              <a:buSzPct val="100000"/>
               <a:buChar char="•"/>
               <a:lnSpc>
                 <a:spcPts val="2200"/>
@@ -4609,14 +5155,16 @@
                 </a:solidFill>
                 <a:latin typeface="Calibri"/>
               </a:rPr>
-              <a:t>Example 13.26 — hands-on module</a:t>
-            </a:r>
-          </a:p>
-          <a:p>
-            <a:pPr>
+              <a:t>Ask whether the release is sensitive or community-controlled</a:t>
+            </a:r>
+          </a:p>
+          <a:p>
+            <a:pPr lvl="0" marL="457200" indent="-228600">
+              <a:buFont typeface="Calibri"/>
               <a:spcAft>
                 <a:spcPts val="1000"/>
               </a:spcAft>
+              <a:buSzPct val="100000"/>
               <a:buChar char="•"/>
               <a:lnSpc>
                 <a:spcPts val="2200"/>
@@ -4629,14 +5177,16 @@
                 </a:solidFill>
                 <a:latin typeface="Calibri"/>
               </a:rPr>
-              <a:t>Example 13.26 illustrates restricted licensing for sensitive health data</a:t>
-            </a:r>
-          </a:p>
-          <a:p>
-            <a:pPr>
+              <a:t>Public-domain paths suit government tables</a:t>
+            </a:r>
+          </a:p>
+          <a:p>
+            <a:pPr lvl="0" marL="457200" indent="-228600">
+              <a:buFont typeface="Calibri"/>
               <a:spcAft>
                 <a:spcPts val="1000"/>
               </a:spcAft>
+              <a:buSzPct val="100000"/>
               <a:buChar char="•"/>
               <a:lnSpc>
                 <a:spcPts val="2200"/>
@@ -4649,67 +5199,7 @@
                 </a:solidFill>
                 <a:latin typeface="Calibri"/>
               </a:rPr>
-              <a:t>Use may be limited to qualified researchers or specific contexts such as academic or</a:t>
-            </a:r>
-          </a:p>
-          <a:p>
-            <a:pPr>
-              <a:spcAft>
-                <a:spcPts val="1000"/>
-              </a:spcAft>
-              <a:buChar char="•"/>
-              <a:lnSpc>
-                <a:spcPts val="2200"/>
-              </a:lnSpc>
-            </a:pPr>
-            <a:r>
-              <a:rPr sz="2000" b="0">
-                <a:solidFill>
-                  <a:srgbClr val="333333"/>
-                </a:solidFill>
-                <a:latin typeface="Calibri"/>
-              </a:rPr>
-              <a:t>Even de-identified data may remain re-identifiable when combined with other releases</a:t>
-            </a:r>
-          </a:p>
-          <a:p>
-            <a:pPr>
-              <a:spcAft>
-                <a:spcPts val="1000"/>
-              </a:spcAft>
-              <a:buChar char="•"/>
-              <a:lnSpc>
-                <a:spcPts val="2200"/>
-              </a:lnSpc>
-            </a:pPr>
-            <a:r>
-              <a:rPr sz="2000" b="0">
-                <a:solidFill>
-                  <a:srgbClr val="333333"/>
-                </a:solidFill>
-                <a:latin typeface="Calibri"/>
-              </a:rPr>
-              <a:t>Explore the chapter example module</a:t>
-            </a:r>
-          </a:p>
-          <a:p>
-            <a:pPr>
-              <a:spcAft>
-                <a:spcPts val="1000"/>
-              </a:spcAft>
-              <a:buChar char="•"/>
-              <a:lnSpc>
-                <a:spcPts val="2200"/>
-              </a:lnSpc>
-            </a:pPr>
-            <a:r>
-              <a:rPr sz="2000" b="0">
-                <a:solidFill>
-                  <a:srgbClr val="333333"/>
-                </a:solidFill>
-                <a:latin typeface="Calibri"/>
-              </a:rPr>
-              <a:t>View files: `modules/chapter13/example26/`</a:t>
+              <a:t>Practice these paths in the course license chooser</a:t>
             </a:r>
           </a:p>
         </p:txBody>
@@ -4805,7 +5295,7 @@
                 </a:solidFill>
                 <a:latin typeface="Calibri"/>
               </a:rPr>
-              <a:t>Ethical obligations after sharing</a:t>
+              <a:t>Licenses and the privacy trade-off</a:t>
             </a:r>
           </a:p>
         </p:txBody>
@@ -4832,10 +5322,12 @@
           </a:bodyPr>
           <a:lstStyle/>
           <a:p>
-            <a:pPr>
+            <a:pPr lvl="0" marL="457200" indent="-228600">
+              <a:buFont typeface="Calibri"/>
               <a:spcAft>
                 <a:spcPts val="1000"/>
               </a:spcAft>
+              <a:buSzPct val="100000"/>
               <a:buChar char="•"/>
               <a:lnSpc>
                 <a:spcPts val="2200"/>
@@ -4848,14 +5340,16 @@
                 </a:solidFill>
                 <a:latin typeface="Calibri"/>
               </a:rPr>
-              <a:t>Ethical principles for collection and privacy are covered in Chapter 3</a:t>
-            </a:r>
-          </a:p>
-          <a:p>
-            <a:pPr>
+              <a:t>Responsible open science depends on clear licenses and ethical constraints</a:t>
+            </a:r>
+          </a:p>
+          <a:p>
+            <a:pPr lvl="0" marL="457200" indent="-228600">
+              <a:buFont typeface="Calibri"/>
               <a:spcAft>
                 <a:spcPts val="1000"/>
               </a:spcAft>
+              <a:buSzPct val="100000"/>
               <a:buChar char="•"/>
               <a:lnSpc>
                 <a:spcPts val="2200"/>
@@ -4868,14 +5362,16 @@
                 </a:solidFill>
                 <a:latin typeface="Calibri"/>
               </a:rPr>
-              <a:t>Open science adds obligations that arise from making data public</a:t>
-            </a:r>
-          </a:p>
-          <a:p>
-            <a:pPr>
+              <a:t>Some teams draft custom or restricted licenses that limit redistribution</a:t>
+            </a:r>
+          </a:p>
+          <a:p>
+            <a:pPr lvl="0" marL="457200" indent="-228600">
+              <a:buFont typeface="Calibri"/>
               <a:spcAft>
                 <a:spcPts val="1000"/>
               </a:spcAft>
+              <a:buSzPct val="100000"/>
               <a:buChar char="•"/>
               <a:lnSpc>
                 <a:spcPts val="2200"/>
@@ -4888,14 +5384,16 @@
                 </a:solidFill>
                 <a:latin typeface="Calibri"/>
               </a:rPr>
-              <a:t>Researchers should document scope and limitations</a:t>
-            </a:r>
-          </a:p>
-          <a:p>
-            <a:pPr>
+              <a:t>Privacy principles and techniques are developed in Chapter 3</a:t>
+            </a:r>
+          </a:p>
+          <a:p>
+            <a:pPr lvl="0" marL="457200" indent="-228600">
+              <a:buFont typeface="Calibri"/>
               <a:spcAft>
                 <a:spcPts val="1000"/>
               </a:spcAft>
+              <a:buSzPct val="100000"/>
               <a:buChar char="•"/>
               <a:lnSpc>
                 <a:spcPts val="2200"/>
@@ -4908,7 +5406,7 @@
                 </a:solidFill>
                 <a:latin typeface="Calibri"/>
               </a:rPr>
-              <a:t>Consent obtained during collection must also cover the intended public release</a:t>
+              <a:t>An unrestricted open license signals broad reuse and is appropriate only after privacy</a:t>
             </a:r>
           </a:p>
         </p:txBody>
@@ -5004,7 +5502,7 @@
                 </a:solidFill>
                 <a:latin typeface="Calibri"/>
               </a:rPr>
-              <a:t>Example 13.27 — Avoid Reinforcing Bias with Open Data</a:t>
+              <a:t>Example 13.26 — Restricted Licenses for Health Data</a:t>
             </a:r>
           </a:p>
         </p:txBody>
@@ -5031,10 +5529,12 @@
           </a:bodyPr>
           <a:lstStyle/>
           <a:p>
-            <a:pPr>
+            <a:pPr lvl="0" marL="457200" indent="-228600">
+              <a:buFont typeface="Calibri"/>
               <a:spcAft>
                 <a:spcPts val="1000"/>
               </a:spcAft>
+              <a:buSzPct val="100000"/>
               <a:buChar char="•"/>
               <a:lnSpc>
                 <a:spcPts val="2200"/>
@@ -5047,14 +5547,16 @@
                 </a:solidFill>
                 <a:latin typeface="Calibri"/>
               </a:rPr>
-              <a:t>Example 13.27 — hands-on module</a:t>
-            </a:r>
-          </a:p>
-          <a:p>
-            <a:pPr>
+              <a:t>Example 13.26 — hands-on module</a:t>
+            </a:r>
+          </a:p>
+          <a:p>
+            <a:pPr lvl="0" marL="457200" indent="-228600">
+              <a:buFont typeface="Calibri"/>
               <a:spcAft>
                 <a:spcPts val="1000"/>
               </a:spcAft>
+              <a:buSzPct val="100000"/>
               <a:buChar char="•"/>
               <a:lnSpc>
                 <a:spcPts val="2200"/>
@@ -5067,14 +5569,16 @@
                 </a:solidFill>
                 <a:latin typeface="Calibri"/>
               </a:rPr>
-              <a:t>Ethical concerns do not end when data are shared; they extend to reuse</a:t>
-            </a:r>
-          </a:p>
-          <a:p>
-            <a:pPr>
+              <a:t>Example 13.26 illustrates restricted licensing for sensitive health data</a:t>
+            </a:r>
+          </a:p>
+          <a:p>
+            <a:pPr lvl="0" marL="457200" indent="-228600">
+              <a:buFont typeface="Calibri"/>
               <a:spcAft>
                 <a:spcPts val="1000"/>
               </a:spcAft>
+              <a:buSzPct val="100000"/>
               <a:buChar char="•"/>
               <a:lnSpc>
                 <a:spcPts val="2200"/>
@@ -5087,14 +5591,16 @@
                 </a:solidFill>
                 <a:latin typeface="Calibri"/>
               </a:rPr>
-              <a:t>Example 13.27 warns against discriminatory reuse of hiring or healthcare datasets</a:t>
-            </a:r>
-          </a:p>
-          <a:p>
-            <a:pPr>
+              <a:t>Use may be limited to qualified researchers or specific contexts such as academic or</a:t>
+            </a:r>
+          </a:p>
+          <a:p>
+            <a:pPr lvl="0" marL="457200" indent="-228600">
+              <a:buFont typeface="Calibri"/>
               <a:spcAft>
                 <a:spcPts val="1000"/>
               </a:spcAft>
+              <a:buSzPct val="100000"/>
               <a:buChar char="•"/>
               <a:lnSpc>
                 <a:spcPts val="2200"/>
@@ -5107,14 +5613,16 @@
                 </a:solidFill>
                 <a:latin typeface="Calibri"/>
               </a:rPr>
-              <a:t>Such data should not be used to reinforce biases or perpetuate systemic inequalities</a:t>
-            </a:r>
-          </a:p>
-          <a:p>
-            <a:pPr>
+              <a:t>Even de-identified data may remain re-identifiable when combined with other releases</a:t>
+            </a:r>
+          </a:p>
+          <a:p>
+            <a:pPr lvl="0" marL="457200" indent="-228600">
+              <a:buFont typeface="Calibri"/>
               <a:spcAft>
                 <a:spcPts val="1000"/>
               </a:spcAft>
+              <a:buSzPct val="100000"/>
               <a:buChar char="•"/>
               <a:lnSpc>
                 <a:spcPts val="2200"/>
@@ -5127,14 +5635,16 @@
                 </a:solidFill>
                 <a:latin typeface="Calibri"/>
               </a:rPr>
-              <a:t>If data reveal disparities</a:t>
-            </a:r>
-          </a:p>
-          <a:p>
-            <a:pPr>
+              <a:t>Explore the chapter example module</a:t>
+            </a:r>
+          </a:p>
+          <a:p>
+            <a:pPr lvl="0" marL="457200" indent="-228600">
+              <a:buFont typeface="Calibri"/>
               <a:spcAft>
                 <a:spcPts val="1000"/>
               </a:spcAft>
+              <a:buSzPct val="100000"/>
               <a:buChar char="•"/>
               <a:lnSpc>
                 <a:spcPts val="2200"/>
@@ -5147,7 +5657,7 @@
                 </a:solidFill>
                 <a:latin typeface="Calibri"/>
               </a:rPr>
-              <a:t>View files: `modules/chapter13/example27/`</a:t>
+              <a:t>View files: `modules/chapter13/example26/`</a:t>
             </a:r>
           </a:p>
         </p:txBody>
@@ -5243,7 +5753,7 @@
                 </a:solidFill>
                 <a:latin typeface="Calibri"/>
               </a:rPr>
-              <a:t>Example 13.28 — Indigenous Control Over Shared Data</a:t>
+              <a:t>Ethical obligations after sharing</a:t>
             </a:r>
           </a:p>
         </p:txBody>
@@ -5270,10 +5780,12 @@
           </a:bodyPr>
           <a:lstStyle/>
           <a:p>
-            <a:pPr>
+            <a:pPr lvl="0" marL="457200" indent="-228600">
+              <a:buFont typeface="Calibri"/>
               <a:spcAft>
                 <a:spcPts val="1000"/>
               </a:spcAft>
+              <a:buSzPct val="100000"/>
               <a:buChar char="•"/>
               <a:lnSpc>
                 <a:spcPts val="2200"/>
@@ -5286,14 +5798,16 @@
                 </a:solidFill>
                 <a:latin typeface="Calibri"/>
               </a:rPr>
-              <a:t>Example 13.28 — hands-on module</a:t>
-            </a:r>
-          </a:p>
-          <a:p>
-            <a:pPr>
+              <a:t>Ethical principles for collection and privacy are covered in Chapter 3</a:t>
+            </a:r>
+          </a:p>
+          <a:p>
+            <a:pPr lvl="0" marL="457200" indent="-228600">
+              <a:buFont typeface="Calibri"/>
               <a:spcAft>
                 <a:spcPts val="1000"/>
               </a:spcAft>
+              <a:buSzPct val="100000"/>
               <a:buChar char="•"/>
               <a:lnSpc>
                 <a:spcPts val="2200"/>
@@ -5306,14 +5820,16 @@
                 </a:solidFill>
                 <a:latin typeface="Calibri"/>
               </a:rPr>
-              <a:t>Open science must respect the rights and wishes of people and communities whose data are</a:t>
-            </a:r>
-          </a:p>
-          <a:p>
-            <a:pPr>
+              <a:t>Open science adds obligations that arise from making data public</a:t>
+            </a:r>
+          </a:p>
+          <a:p>
+            <a:pPr lvl="0" marL="457200" indent="-228600">
+              <a:buFont typeface="Calibri"/>
               <a:spcAft>
                 <a:spcPts val="1000"/>
               </a:spcAft>
+              <a:buSzPct val="100000"/>
               <a:buChar char="•"/>
               <a:lnSpc>
                 <a:spcPts val="2200"/>
@@ -5326,14 +5842,16 @@
                 </a:solidFill>
                 <a:latin typeface="Calibri"/>
               </a:rPr>
-              <a:t>Communities involved in collection</a:t>
-            </a:r>
-          </a:p>
-          <a:p>
-            <a:pPr>
+              <a:t>Researchers should document scope and limitations</a:t>
+            </a:r>
+          </a:p>
+          <a:p>
+            <a:pPr lvl="0" marL="457200" indent="-228600">
+              <a:buFont typeface="Calibri"/>
               <a:spcAft>
                 <a:spcPts val="1000"/>
               </a:spcAft>
+              <a:buSzPct val="100000"/>
               <a:buChar char="•"/>
               <a:lnSpc>
                 <a:spcPts val="2200"/>
@@ -5346,47 +5864,7 @@
                 </a:solidFill>
                 <a:latin typeface="Calibri"/>
               </a:rPr>
-              <a:t>Example 13.28 emphasizes that indigenous communities involved in ecological or</a:t>
-            </a:r>
-          </a:p>
-          <a:p>
-            <a:pPr>
-              <a:spcAft>
-                <a:spcPts val="1000"/>
-              </a:spcAft>
-              <a:buChar char="•"/>
-              <a:lnSpc>
-                <a:spcPts val="2200"/>
-              </a:lnSpc>
-            </a:pPr>
-            <a:r>
-              <a:rPr sz="2000" b="0">
-                <a:solidFill>
-                  <a:srgbClr val="333333"/>
-                </a:solidFill>
-                <a:latin typeface="Calibri"/>
-              </a:rPr>
-              <a:t>Explore the chapter example module</a:t>
-            </a:r>
-          </a:p>
-          <a:p>
-            <a:pPr>
-              <a:spcAft>
-                <a:spcPts val="1000"/>
-              </a:spcAft>
-              <a:buChar char="•"/>
-              <a:lnSpc>
-                <a:spcPts val="2200"/>
-              </a:lnSpc>
-            </a:pPr>
-            <a:r>
-              <a:rPr sz="2000" b="0">
-                <a:solidFill>
-                  <a:srgbClr val="333333"/>
-                </a:solidFill>
-                <a:latin typeface="Calibri"/>
-              </a:rPr>
-              <a:t>View files: `modules/chapter13/example28/`</a:t>
+              <a:t>Consent obtained during collection must also cover the intended public release</a:t>
             </a:r>
           </a:p>
         </p:txBody>
@@ -5482,7 +5960,7 @@
                 </a:solidFill>
                 <a:latin typeface="Calibri"/>
               </a:rPr>
-              <a:t>Takeaways</a:t>
+              <a:t>Example 13.27 — Avoid Reinforcing Bias with Open Data</a:t>
             </a:r>
           </a:p>
         </p:txBody>
@@ -5509,10 +5987,12 @@
           </a:bodyPr>
           <a:lstStyle/>
           <a:p>
-            <a:pPr>
+            <a:pPr lvl="0" marL="457200" indent="-228600">
+              <a:buFont typeface="Calibri"/>
               <a:spcAft>
                 <a:spcPts val="1000"/>
               </a:spcAft>
+              <a:buSzPct val="100000"/>
               <a:buChar char="•"/>
               <a:lnSpc>
                 <a:spcPts val="2200"/>
@@ -5525,14 +6005,16 @@
                 </a:solidFill>
                 <a:latin typeface="Calibri"/>
               </a:rPr>
-              <a:t>Licenses can be open or restricted; health data often need limited-access terms</a:t>
-            </a:r>
-          </a:p>
-          <a:p>
-            <a:pPr>
+              <a:t>Example 13.27 — hands-on module</a:t>
+            </a:r>
+          </a:p>
+          <a:p>
+            <a:pPr lvl="0" marL="457200" indent="-228600">
+              <a:buFont typeface="Calibri"/>
               <a:spcAft>
                 <a:spcPts val="1000"/>
               </a:spcAft>
+              <a:buSzPct val="100000"/>
               <a:buChar char="•"/>
               <a:lnSpc>
                 <a:spcPts val="2200"/>
@@ -5545,14 +6027,16 @@
                 </a:solidFill>
                 <a:latin typeface="Calibri"/>
               </a:rPr>
-              <a:t>License choice must follow a privacy assessment, not precede it</a:t>
-            </a:r>
-          </a:p>
-          <a:p>
-            <a:pPr>
+              <a:t>Ethical concerns do not end when data are shared; they extend to reuse</a:t>
+            </a:r>
+          </a:p>
+          <a:p>
+            <a:pPr lvl="0" marL="457200" indent="-228600">
+              <a:buFont typeface="Calibri"/>
               <a:spcAft>
                 <a:spcPts val="1000"/>
               </a:spcAft>
+              <a:buSzPct val="100000"/>
               <a:buChar char="•"/>
               <a:lnSpc>
                 <a:spcPts val="2200"/>
@@ -5565,14 +6049,16 @@
                 </a:solidFill>
                 <a:latin typeface="Calibri"/>
               </a:rPr>
-              <a:t>Open release creates ongoing ethical duties around bias, security, attribution, and scope</a:t>
-            </a:r>
-          </a:p>
-          <a:p>
-            <a:pPr>
+              <a:t>Example 13.27 warns against discriminatory reuse of hiring or healthcare datasets</a:t>
+            </a:r>
+          </a:p>
+          <a:p>
+            <a:pPr lvl="0" marL="457200" indent="-228600">
+              <a:buFont typeface="Calibri"/>
               <a:spcAft>
                 <a:spcPts val="1000"/>
               </a:spcAft>
+              <a:buSzPct val="100000"/>
               <a:buChar char="•"/>
               <a:lnSpc>
                 <a:spcPts val="2200"/>
@@ -5585,14 +6071,16 @@
                 </a:solidFill>
                 <a:latin typeface="Calibri"/>
               </a:rPr>
-              <a:t>Including indigenous communities, retain legitimate control over sharing decisions</a:t>
-            </a:r>
-          </a:p>
-          <a:p>
-            <a:pPr>
+              <a:t>Such data should not be used to reinforce biases or perpetuate systemic inequalities</a:t>
+            </a:r>
+          </a:p>
+          <a:p>
+            <a:pPr lvl="0" marL="457200" indent="-228600">
+              <a:buFont typeface="Calibri"/>
               <a:spcAft>
                 <a:spcPts val="1000"/>
               </a:spcAft>
+              <a:buSzPct val="100000"/>
               <a:buChar char="•"/>
               <a:lnSpc>
                 <a:spcPts val="2200"/>
@@ -5605,7 +6093,29 @@
                 </a:solidFill>
                 <a:latin typeface="Calibri"/>
               </a:rPr>
-              <a:t>Openness without ethics and privacy is not responsible open science</a:t>
+              <a:t>If data reveal disparities</a:t>
+            </a:r>
+          </a:p>
+          <a:p>
+            <a:pPr lvl="0" marL="457200" indent="-228600">
+              <a:buFont typeface="Calibri"/>
+              <a:spcAft>
+                <a:spcPts val="1000"/>
+              </a:spcAft>
+              <a:buSzPct val="100000"/>
+              <a:buChar char="•"/>
+              <a:lnSpc>
+                <a:spcPts val="2200"/>
+              </a:lnSpc>
+            </a:pPr>
+            <a:r>
+              <a:rPr sz="2000" b="0">
+                <a:solidFill>
+                  <a:srgbClr val="333333"/>
+                </a:solidFill>
+                <a:latin typeface="Calibri"/>
+              </a:rPr>
+              <a:t>View files: `modules/chapter13/example27/`</a:t>
             </a:r>
           </a:p>
         </p:txBody>
@@ -5701,7 +6211,7 @@
                 </a:solidFill>
                 <a:latin typeface="Calibri"/>
               </a:rPr>
-              <a:t>Next</a:t>
+              <a:t>Example 13.28 — Indigenous Control Over Shared Data</a:t>
             </a:r>
           </a:p>
         </p:txBody>
@@ -5728,10 +6238,12 @@
           </a:bodyPr>
           <a:lstStyle/>
           <a:p>
-            <a:pPr>
+            <a:pPr lvl="0" marL="457200" indent="-228600">
+              <a:buFont typeface="Calibri"/>
               <a:spcAft>
                 <a:spcPts val="1000"/>
               </a:spcAft>
+              <a:buSzPct val="100000"/>
               <a:buChar char="•"/>
               <a:lnSpc>
                 <a:spcPts val="2200"/>
@@ -5744,14 +6256,16 @@
                 </a:solidFill>
                 <a:latin typeface="Calibri"/>
               </a:rPr>
-              <a:t>Complete the quiz for this part</a:t>
-            </a:r>
-          </a:p>
-          <a:p>
-            <a:pPr>
+              <a:t>Example 13.28 — hands-on module</a:t>
+            </a:r>
+          </a:p>
+          <a:p>
+            <a:pPr lvl="0" marL="457200" indent="-228600">
+              <a:buFont typeface="Calibri"/>
               <a:spcAft>
                 <a:spcPts val="1000"/>
               </a:spcAft>
+              <a:buSzPct val="100000"/>
               <a:buChar char="•"/>
               <a:lnSpc>
                 <a:spcPts val="2200"/>
@@ -5764,7 +6278,95 @@
                 </a:solidFill>
                 <a:latin typeface="Calibri"/>
               </a:rPr>
-              <a:t>The next part covers reproducible research workflows</a:t>
+              <a:t>Open science must respect the rights and wishes of people and communities whose data are</a:t>
+            </a:r>
+          </a:p>
+          <a:p>
+            <a:pPr lvl="0" marL="457200" indent="-228600">
+              <a:buFont typeface="Calibri"/>
+              <a:spcAft>
+                <a:spcPts val="1000"/>
+              </a:spcAft>
+              <a:buSzPct val="100000"/>
+              <a:buChar char="•"/>
+              <a:lnSpc>
+                <a:spcPts val="2200"/>
+              </a:lnSpc>
+            </a:pPr>
+            <a:r>
+              <a:rPr sz="2000" b="0">
+                <a:solidFill>
+                  <a:srgbClr val="333333"/>
+                </a:solidFill>
+                <a:latin typeface="Calibri"/>
+              </a:rPr>
+              <a:t>Communities involved in collection</a:t>
+            </a:r>
+          </a:p>
+          <a:p>
+            <a:pPr lvl="0" marL="457200" indent="-228600">
+              <a:buFont typeface="Calibri"/>
+              <a:spcAft>
+                <a:spcPts val="1000"/>
+              </a:spcAft>
+              <a:buSzPct val="100000"/>
+              <a:buChar char="•"/>
+              <a:lnSpc>
+                <a:spcPts val="2200"/>
+              </a:lnSpc>
+            </a:pPr>
+            <a:r>
+              <a:rPr sz="2000" b="0">
+                <a:solidFill>
+                  <a:srgbClr val="333333"/>
+                </a:solidFill>
+                <a:latin typeface="Calibri"/>
+              </a:rPr>
+              <a:t>Example 13.28 emphasizes that Indigenous communities involved in ecological or</a:t>
+            </a:r>
+          </a:p>
+          <a:p>
+            <a:pPr lvl="0" marL="457200" indent="-228600">
+              <a:buFont typeface="Calibri"/>
+              <a:spcAft>
+                <a:spcPts val="1000"/>
+              </a:spcAft>
+              <a:buSzPct val="100000"/>
+              <a:buChar char="•"/>
+              <a:lnSpc>
+                <a:spcPts val="2200"/>
+              </a:lnSpc>
+            </a:pPr>
+            <a:r>
+              <a:rPr sz="2000" b="0">
+                <a:solidFill>
+                  <a:srgbClr val="333333"/>
+                </a:solidFill>
+                <a:latin typeface="Calibri"/>
+              </a:rPr>
+              <a:t>Explore the chapter example module</a:t>
+            </a:r>
+          </a:p>
+          <a:p>
+            <a:pPr lvl="0" marL="457200" indent="-228600">
+              <a:buFont typeface="Calibri"/>
+              <a:spcAft>
+                <a:spcPts val="1000"/>
+              </a:spcAft>
+              <a:buSzPct val="100000"/>
+              <a:buChar char="•"/>
+              <a:lnSpc>
+                <a:spcPts val="2200"/>
+              </a:lnSpc>
+            </a:pPr>
+            <a:r>
+              <a:rPr sz="2000" b="0">
+                <a:solidFill>
+                  <a:srgbClr val="333333"/>
+                </a:solidFill>
+                <a:latin typeface="Calibri"/>
+              </a:rPr>
+              <a:t>View files: `modules/chapter13/example28/`</a:t>
             </a:r>
           </a:p>
         </p:txBody>
